--- a/data/test_files/pptx_slide_order_notes.pptx
+++ b/data/test_files/pptx_slide_order_notes.pptx
@@ -940,8 +940,12 @@
           <a:lstStyle/>
           <a:p>
             <a:r>
-              <a:t>Budget is draft until board sign-off</a:t>
-            </a:r>
+              <a:t>Budget is draft as of </a:t>
+            </a:r>
+            <a:fld id="{B6F15528-21DE-4FAA-801E-634DDDAF4B01}" type="datetime1">
+              <a:rPr lang="en-US"/>
+              <a:t>29/09/2026</a:t>
+            </a:fld>
           </a:p>
         </p:txBody>
       </p:sp>
@@ -4836,7 +4840,15 @@
           <a:lstStyle/>
           <a:p>
             <a:r>
-              <a:t>What we measure</a:t>
+              <a:t>Slide </a:t>
+            </a:r>
+            <a:fld id="{B6F15528-21DE-4FAA-801E-634DDDAF4B01}" type="slidenum">
+              <a:rPr lang="en-US"/>
+              <a:t>10</a:t>
+            </a:fld>
+            <a:r>
+              <a:rPr lang="en-US"/>
+              <a:t> of 13</a:t>
             </a:r>
           </a:p>
         </p:txBody>
